--- a/Защита_проекта.pptx
+++ b/Защита_проекта.pptx
@@ -215,7 +215,7 @@
           <a:p>
             <a:fld id="{B7268E1E-0E44-426D-905E-8AD9B19D2182}" type="datetimeFigureOut">
               <a:rPr lang="cs-CZ" smtClean="0"/>
-              <a:t>31.05.2026</a:t>
+              <a:t>02.06.2026</a:t>
             </a:fld>
             <a:endParaRPr lang="cs-CZ"/>
           </a:p>
@@ -2417,7 +2417,7 @@
             <a:fld id="{1D8BD707-D9CF-40AE-B4C6-C98DA3205C09}" type="datetimeFigureOut">
               <a:rPr lang="en-US" smtClean="0"/>
               <a:pPr/>
-              <a:t>5/31/2026</a:t>
+              <a:t>6/2/2026</a:t>
             </a:fld>
             <a:endParaRPr lang="en-US"/>
           </a:p>
@@ -2584,7 +2584,7 @@
             <a:fld id="{1D8BD707-D9CF-40AE-B4C6-C98DA3205C09}" type="datetimeFigureOut">
               <a:rPr lang="en-US" smtClean="0"/>
               <a:pPr/>
-              <a:t>5/31/2026</a:t>
+              <a:t>6/2/2026</a:t>
             </a:fld>
             <a:endParaRPr lang="en-US"/>
           </a:p>
@@ -2761,7 +2761,7 @@
             <a:fld id="{1D8BD707-D9CF-40AE-B4C6-C98DA3205C09}" type="datetimeFigureOut">
               <a:rPr lang="en-US" smtClean="0"/>
               <a:pPr/>
-              <a:t>5/31/2026</a:t>
+              <a:t>6/2/2026</a:t>
             </a:fld>
             <a:endParaRPr lang="en-US"/>
           </a:p>
@@ -2928,7 +2928,7 @@
             <a:fld id="{1D8BD707-D9CF-40AE-B4C6-C98DA3205C09}" type="datetimeFigureOut">
               <a:rPr lang="en-US" smtClean="0"/>
               <a:pPr/>
-              <a:t>5/31/2026</a:t>
+              <a:t>6/2/2026</a:t>
             </a:fld>
             <a:endParaRPr lang="en-US"/>
           </a:p>
@@ -3171,7 +3171,7 @@
             <a:fld id="{1D8BD707-D9CF-40AE-B4C6-C98DA3205C09}" type="datetimeFigureOut">
               <a:rPr lang="en-US" smtClean="0"/>
               <a:pPr/>
-              <a:t>5/31/2026</a:t>
+              <a:t>6/2/2026</a:t>
             </a:fld>
             <a:endParaRPr lang="en-US"/>
           </a:p>
@@ -3456,7 +3456,7 @@
             <a:fld id="{1D8BD707-D9CF-40AE-B4C6-C98DA3205C09}" type="datetimeFigureOut">
               <a:rPr lang="en-US" smtClean="0"/>
               <a:pPr/>
-              <a:t>5/31/2026</a:t>
+              <a:t>6/2/2026</a:t>
             </a:fld>
             <a:endParaRPr lang="en-US"/>
           </a:p>
@@ -3875,7 +3875,7 @@
             <a:fld id="{1D8BD707-D9CF-40AE-B4C6-C98DA3205C09}" type="datetimeFigureOut">
               <a:rPr lang="en-US" smtClean="0"/>
               <a:pPr/>
-              <a:t>5/31/2026</a:t>
+              <a:t>6/2/2026</a:t>
             </a:fld>
             <a:endParaRPr lang="en-US"/>
           </a:p>
@@ -3990,7 +3990,7 @@
             <a:fld id="{1D8BD707-D9CF-40AE-B4C6-C98DA3205C09}" type="datetimeFigureOut">
               <a:rPr lang="en-US" smtClean="0"/>
               <a:pPr/>
-              <a:t>5/31/2026</a:t>
+              <a:t>6/2/2026</a:t>
             </a:fld>
             <a:endParaRPr lang="en-US"/>
           </a:p>
@@ -4082,7 +4082,7 @@
             <a:fld id="{1D8BD707-D9CF-40AE-B4C6-C98DA3205C09}" type="datetimeFigureOut">
               <a:rPr lang="en-US" smtClean="0"/>
               <a:pPr/>
-              <a:t>5/31/2026</a:t>
+              <a:t>6/2/2026</a:t>
             </a:fld>
             <a:endParaRPr lang="en-US"/>
           </a:p>
@@ -4356,7 +4356,7 @@
             <a:fld id="{1D8BD707-D9CF-40AE-B4C6-C98DA3205C09}" type="datetimeFigureOut">
               <a:rPr lang="en-US" smtClean="0"/>
               <a:pPr/>
-              <a:t>5/31/2026</a:t>
+              <a:t>6/2/2026</a:t>
             </a:fld>
             <a:endParaRPr lang="en-US"/>
           </a:p>
@@ -4606,7 +4606,7 @@
             <a:fld id="{1D8BD707-D9CF-40AE-B4C6-C98DA3205C09}" type="datetimeFigureOut">
               <a:rPr lang="en-US" smtClean="0"/>
               <a:pPr/>
-              <a:t>5/31/2026</a:t>
+              <a:t>6/2/2026</a:t>
             </a:fld>
             <a:endParaRPr lang="en-US"/>
           </a:p>
@@ -4816,7 +4816,7 @@
             <a:fld id="{1D8BD707-D9CF-40AE-B4C6-C98DA3205C09}" type="datetimeFigureOut">
               <a:rPr lang="en-US" smtClean="0"/>
               <a:pPr/>
-              <a:t>5/31/2026</a:t>
+              <a:t>6/2/2026</a:t>
             </a:fld>
             <a:endParaRPr lang="en-US"/>
           </a:p>
@@ -16772,14 +16772,128 @@
         </p:blipFill>
         <p:spPr>
           <a:xfrm>
-            <a:off x="10803297" y="7967019"/>
-            <a:ext cx="1070063" cy="1070063"/>
+            <a:off x="9433703" y="7991275"/>
+            <a:ext cx="1008775" cy="1008775"/>
           </a:xfrm>
           <a:prstGeom prst="rect">
             <a:avLst/>
           </a:prstGeom>
         </p:spPr>
       </p:pic>
+      <p:pic>
+        <p:nvPicPr>
+          <p:cNvPr id="24" name="Рисунок 23"/>
+          <p:cNvPicPr>
+            <a:picLocks noChangeAspect="1"/>
+          </p:cNvPicPr>
+          <p:nvPr/>
+        </p:nvPicPr>
+        <p:blipFill>
+          <a:blip r:embed="rId6" cstate="print">
+            <a:extLst>
+              <a:ext uri="{28A0092B-C50C-407E-A947-70E740481C1C}">
+                <a14:useLocalDpi xmlns:a14="http://schemas.microsoft.com/office/drawing/2010/main" val="0"/>
+              </a:ext>
+            </a:extLst>
+          </a:blip>
+          <a:stretch>
+            <a:fillRect/>
+          </a:stretch>
+        </p:blipFill>
+        <p:spPr>
+          <a:xfrm>
+            <a:off x="11191314" y="7967882"/>
+            <a:ext cx="1069200" cy="1069200"/>
+          </a:xfrm>
+          <a:prstGeom prst="rect">
+            <a:avLst/>
+          </a:prstGeom>
+        </p:spPr>
+      </p:pic>
+      <p:sp>
+        <p:nvSpPr>
+          <p:cNvPr id="26" name="TextBox 25"/>
+          <p:cNvSpPr txBox="1"/>
+          <p:nvPr/>
+        </p:nvSpPr>
+        <p:spPr>
+          <a:xfrm>
+            <a:off x="9601200" y="9013984"/>
+            <a:ext cx="631904" cy="307777"/>
+          </a:xfrm>
+          <a:prstGeom prst="rect">
+            <a:avLst/>
+          </a:prstGeom>
+          <a:noFill/>
+        </p:spPr>
+        <p:txBody>
+          <a:bodyPr wrap="none" rtlCol="0">
+            <a:spAutoFit/>
+          </a:bodyPr>
+          <a:lstStyle/>
+          <a:p>
+            <a:r>
+              <a:rPr lang="ru-RU" sz="1400" smtClean="0">
+                <a:solidFill>
+                  <a:schemeClr val="bg1"/>
+                </a:solidFill>
+              </a:rPr>
+              <a:t>4 мин</a:t>
+            </a:r>
+            <a:endParaRPr lang="ru-RU" sz="1400">
+              <a:solidFill>
+                <a:schemeClr val="bg1"/>
+              </a:solidFill>
+            </a:endParaRPr>
+          </a:p>
+        </p:txBody>
+      </p:sp>
+      <p:sp>
+        <p:nvSpPr>
+          <p:cNvPr id="27" name="TextBox 26"/>
+          <p:cNvSpPr txBox="1"/>
+          <p:nvPr/>
+        </p:nvSpPr>
+        <p:spPr>
+          <a:xfrm>
+            <a:off x="11412233" y="9013984"/>
+            <a:ext cx="631904" cy="307777"/>
+          </a:xfrm>
+          <a:prstGeom prst="rect">
+            <a:avLst/>
+          </a:prstGeom>
+          <a:noFill/>
+        </p:spPr>
+        <p:txBody>
+          <a:bodyPr wrap="none" rtlCol="0">
+            <a:spAutoFit/>
+          </a:bodyPr>
+          <a:lstStyle/>
+          <a:p>
+            <a:r>
+              <a:rPr lang="ru-RU" sz="1400">
+                <a:solidFill>
+                  <a:schemeClr val="bg1"/>
+                </a:solidFill>
+              </a:rPr>
+              <a:t>2</a:t>
+            </a:r>
+            <a:r>
+              <a:rPr lang="ru-RU" sz="1400" smtClean="0">
+                <a:solidFill>
+                  <a:schemeClr val="bg1"/>
+                </a:solidFill>
+              </a:rPr>
+              <a:t> мин</a:t>
+            </a:r>
+            <a:endParaRPr lang="ru-RU" sz="1400">
+              <a:solidFill>
+                <a:schemeClr val="bg1"/>
+              </a:solidFill>
+            </a:endParaRPr>
+          </a:p>
+        </p:txBody>
+      </p:sp>
     </p:spTree>
   </p:cSld>
   <p:clrMapOvr>

--- a/Защита_проекта.pptx
+++ b/Защита_проекта.pptx
@@ -16818,8 +16818,8 @@
         </p:nvSpPr>
         <p:spPr>
           <a:xfrm>
-            <a:off x="9601200" y="9013984"/>
-            <a:ext cx="631904" cy="307777"/>
+            <a:off x="9341622" y="9013984"/>
+            <a:ext cx="1306768" cy="307777"/>
           </a:xfrm>
           <a:prstGeom prst="rect">
             <a:avLst/>
@@ -16838,7 +16838,23 @@
                   <a:schemeClr val="bg1"/>
                 </a:solidFill>
               </a:rPr>
-              <a:t>4 мин</a:t>
+              <a:t>4 </a:t>
+            </a:r>
+            <a:r>
+              <a:rPr lang="ru-RU" sz="1400" smtClean="0">
+                <a:solidFill>
+                  <a:schemeClr val="bg1"/>
+                </a:solidFill>
+              </a:rPr>
+              <a:t>мин (150</a:t>
+            </a:r>
+            <a:r>
+              <a:rPr lang="en-US" sz="1400" smtClean="0">
+                <a:solidFill>
+                  <a:schemeClr val="bg1"/>
+                </a:solidFill>
+              </a:rPr>
+              <a:t>MB)</a:t>
             </a:r>
             <a:endParaRPr lang="ru-RU" sz="1400">
               <a:solidFill>
@@ -16856,8 +16872,8 @@
         </p:nvSpPr>
         <p:spPr>
           <a:xfrm>
-            <a:off x="11412233" y="9013984"/>
-            <a:ext cx="631904" cy="307777"/>
+            <a:off x="11098178" y="9013984"/>
+            <a:ext cx="1255472" cy="307777"/>
           </a:xfrm>
           <a:prstGeom prst="rect">
             <a:avLst/>
@@ -16884,7 +16900,23 @@
                   <a:schemeClr val="bg1"/>
                 </a:solidFill>
               </a:rPr>
-              <a:t> мин</a:t>
+              <a:t> </a:t>
+            </a:r>
+            <a:r>
+              <a:rPr lang="ru-RU" sz="1400" smtClean="0">
+                <a:solidFill>
+                  <a:schemeClr val="bg1"/>
+                </a:solidFill>
+              </a:rPr>
+              <a:t>мин</a:t>
+            </a:r>
+            <a:r>
+              <a:rPr lang="en-US" sz="1400" smtClean="0">
+                <a:solidFill>
+                  <a:schemeClr val="bg1"/>
+                </a:solidFill>
+              </a:rPr>
+              <a:t> (80 MB)</a:t>
             </a:r>
             <a:endParaRPr lang="ru-RU" sz="1400">
               <a:solidFill>

--- a/Защита_проекта.pptx
+++ b/Защита_проекта.pptx
@@ -16838,15 +16838,7 @@
                   <a:schemeClr val="bg1"/>
                 </a:solidFill>
               </a:rPr>
-              <a:t>4 </a:t>
-            </a:r>
-            <a:r>
-              <a:rPr lang="ru-RU" sz="1400" smtClean="0">
-                <a:solidFill>
-                  <a:schemeClr val="bg1"/>
-                </a:solidFill>
-              </a:rPr>
-              <a:t>мин (150</a:t>
+              <a:t>4 мин (150</a:t>
             </a:r>
             <a:r>
               <a:rPr lang="en-US" sz="1400" smtClean="0">
@@ -16900,15 +16892,7 @@
                   <a:schemeClr val="bg1"/>
                 </a:solidFill>
               </a:rPr>
-              <a:t> </a:t>
-            </a:r>
-            <a:r>
-              <a:rPr lang="ru-RU" sz="1400" smtClean="0">
-                <a:solidFill>
-                  <a:schemeClr val="bg1"/>
-                </a:solidFill>
-              </a:rPr>
-              <a:t>мин</a:t>
+              <a:t> мин</a:t>
             </a:r>
             <a:r>
               <a:rPr lang="en-US" sz="1400" smtClean="0">
